--- a/slides/第06回_ストレージとファイルシステム.pptx
+++ b/slides/第06回_ストレージとファイルシステム.pptx
@@ -3898,7 +3898,7 @@
         <p:spPr>
           <a:xfrm>
             <a:off x="685800" y="1481328"/>
-            <a:ext cx="10789920" cy="621792"/>
+            <a:ext cx="10789920" cy="365760"/>
           </a:xfrm>
           <a:prstGeom prst="rect">
             <a:avLst/>
@@ -3939,7 +3939,7 @@
         </p:nvSpPr>
         <p:spPr>
           <a:xfrm>
-            <a:off x="685800" y="2139696"/>
+            <a:off x="685800" y="1883664"/>
             <a:ext cx="3444240" cy="1554480"/>
           </a:xfrm>
           <a:prstGeom prst="roundRect">
@@ -3966,7 +3966,7 @@
         </p:nvSpPr>
         <p:spPr>
           <a:xfrm>
-            <a:off x="868680" y="2276856"/>
+            <a:off x="868680" y="2020824"/>
             <a:ext cx="3078480" cy="310896"/>
           </a:xfrm>
           <a:prstGeom prst="rect">
@@ -4005,7 +4005,7 @@
         </p:nvSpPr>
         <p:spPr>
           <a:xfrm>
-            <a:off x="868680" y="2624328"/>
+            <a:off x="868680" y="2368296"/>
             <a:ext cx="3078480" cy="914400"/>
           </a:xfrm>
           <a:prstGeom prst="rect">
@@ -4047,7 +4047,7 @@
         </p:nvSpPr>
         <p:spPr>
           <a:xfrm>
-            <a:off x="4358640" y="2139696"/>
+            <a:off x="4358640" y="1883664"/>
             <a:ext cx="3444240" cy="1554480"/>
           </a:xfrm>
           <a:prstGeom prst="roundRect">
@@ -4074,7 +4074,7 @@
         </p:nvSpPr>
         <p:spPr>
           <a:xfrm>
-            <a:off x="4541520" y="2276856"/>
+            <a:off x="4541520" y="2020824"/>
             <a:ext cx="3078480" cy="310896"/>
           </a:xfrm>
           <a:prstGeom prst="rect">
@@ -4113,7 +4113,7 @@
         </p:nvSpPr>
         <p:spPr>
           <a:xfrm>
-            <a:off x="4541520" y="2624328"/>
+            <a:off x="4541520" y="2368296"/>
             <a:ext cx="3078480" cy="914400"/>
           </a:xfrm>
           <a:prstGeom prst="rect">
@@ -4155,7 +4155,7 @@
         </p:nvSpPr>
         <p:spPr>
           <a:xfrm>
-            <a:off x="8031480" y="2139696"/>
+            <a:off x="8031480" y="1883664"/>
             <a:ext cx="3444240" cy="1554480"/>
           </a:xfrm>
           <a:prstGeom prst="roundRect">
@@ -4182,7 +4182,7 @@
         </p:nvSpPr>
         <p:spPr>
           <a:xfrm>
-            <a:off x="8214360" y="2276856"/>
+            <a:off x="8214360" y="2020824"/>
             <a:ext cx="3078480" cy="310896"/>
           </a:xfrm>
           <a:prstGeom prst="rect">
@@ -4221,7 +4221,7 @@
         </p:nvSpPr>
         <p:spPr>
           <a:xfrm>
-            <a:off x="8214360" y="2624328"/>
+            <a:off x="8214360" y="2368296"/>
             <a:ext cx="3078480" cy="914400"/>
           </a:xfrm>
           <a:prstGeom prst="rect">
@@ -7422,7 +7422,7 @@
         <p:spPr>
           <a:xfrm>
             <a:off x="685800" y="1481328"/>
-            <a:ext cx="10789920" cy="621792"/>
+            <a:ext cx="10789920" cy="365760"/>
           </a:xfrm>
           <a:prstGeom prst="rect">
             <a:avLst/>
@@ -7471,53 +7471,14 @@
         </p:blipFill>
         <p:spPr>
           <a:xfrm>
-            <a:off x="3534355" y="2139696"/>
-            <a:ext cx="5092810" cy="3346704"/>
+            <a:off x="3339548" y="1883664"/>
+            <a:ext cx="5482424" cy="3602736"/>
           </a:xfrm>
           <a:prstGeom prst="rect">
             <a:avLst/>
           </a:prstGeom>
         </p:spPr>
       </p:pic>
-      <p:sp>
-        <p:nvSpPr>
-          <p:cNvPr id="7" name="Text 4"/>
-          <p:cNvSpPr/>
-          <p:nvPr/>
-        </p:nvSpPr>
-        <p:spPr>
-          <a:xfrm>
-            <a:off x="685800" y="5687568"/>
-            <a:ext cx="10789920" cy="365760"/>
-          </a:xfrm>
-          <a:prstGeom prst="rect">
-            <a:avLst/>
-          </a:prstGeom>
-          <a:noFill/>
-          <a:ln/>
-        </p:spPr>
-        <p:txBody>
-          <a:bodyPr wrap="square" lIns="0" tIns="0" rIns="0" bIns="0" rtlCol="0" anchor="ctr"/>
-          <a:lstStyle/>
-          <a:p>
-            <a:pPr algn="ctr" indent="0" marL="0">
-              <a:buNone/>
-            </a:pPr>
-            <a:r>
-              <a:rPr lang="en-US" sz="1500" dirty="0">
-                <a:solidFill>
-                  <a:srgbClr val="16191D"/>
-                </a:solidFill>
-                <a:latin typeface="Yu Gothic" pitchFamily="34" charset="0"/>
-                <a:ea typeface="Yu Gothic" pitchFamily="34" charset="-122"/>
-                <a:cs typeface="Yu Gothic" pitchFamily="34" charset="-120"/>
-              </a:rPr>
-              <a:t>パリティは XOR。A ⊕ P ⊕ C = B のように、残りから復元できる。</a:t>
-            </a:r>
-            <a:endParaRPr lang="en-US" sz="1500" dirty="0"/>
-          </a:p>
-        </p:txBody>
-      </p:sp>
     </p:spTree>
   </p:cSld>
   <p:clrMapOvr>
@@ -17424,7 +17385,7 @@
         <p:spPr>
           <a:xfrm>
             <a:off x="685800" y="1481328"/>
-            <a:ext cx="10789920" cy="621792"/>
+            <a:ext cx="10789920" cy="365760"/>
           </a:xfrm>
           <a:prstGeom prst="rect">
             <a:avLst/>
@@ -17465,7 +17426,7 @@
         </p:nvSpPr>
         <p:spPr>
           <a:xfrm>
-            <a:off x="685800" y="2139696"/>
+            <a:off x="685800" y="1883664"/>
             <a:ext cx="3444240" cy="1554480"/>
           </a:xfrm>
           <a:prstGeom prst="roundRect">
@@ -17492,7 +17453,7 @@
         </p:nvSpPr>
         <p:spPr>
           <a:xfrm>
-            <a:off x="868680" y="2276856"/>
+            <a:off x="868680" y="2020824"/>
             <a:ext cx="3078480" cy="310896"/>
           </a:xfrm>
           <a:prstGeom prst="rect">
@@ -17531,7 +17492,7 @@
         </p:nvSpPr>
         <p:spPr>
           <a:xfrm>
-            <a:off x="868680" y="2624328"/>
+            <a:off x="868680" y="2368296"/>
             <a:ext cx="3078480" cy="914400"/>
           </a:xfrm>
           <a:prstGeom prst="rect">
@@ -17573,7 +17534,7 @@
         </p:nvSpPr>
         <p:spPr>
           <a:xfrm>
-            <a:off x="4358640" y="2139696"/>
+            <a:off x="4358640" y="1883664"/>
             <a:ext cx="3444240" cy="1554480"/>
           </a:xfrm>
           <a:prstGeom prst="roundRect">
@@ -17600,7 +17561,7 @@
         </p:nvSpPr>
         <p:spPr>
           <a:xfrm>
-            <a:off x="4541520" y="2276856"/>
+            <a:off x="4541520" y="2020824"/>
             <a:ext cx="3078480" cy="310896"/>
           </a:xfrm>
           <a:prstGeom prst="rect">
@@ -17639,7 +17600,7 @@
         </p:nvSpPr>
         <p:spPr>
           <a:xfrm>
-            <a:off x="4541520" y="2624328"/>
+            <a:off x="4541520" y="2368296"/>
             <a:ext cx="3078480" cy="914400"/>
           </a:xfrm>
           <a:prstGeom prst="rect">
@@ -17681,7 +17642,7 @@
         </p:nvSpPr>
         <p:spPr>
           <a:xfrm>
-            <a:off x="8031480" y="2139696"/>
+            <a:off x="8031480" y="1883664"/>
             <a:ext cx="3444240" cy="1554480"/>
           </a:xfrm>
           <a:prstGeom prst="roundRect">
@@ -17708,7 +17669,7 @@
         </p:nvSpPr>
         <p:spPr>
           <a:xfrm>
-            <a:off x="8214360" y="2276856"/>
+            <a:off x="8214360" y="2020824"/>
             <a:ext cx="3078480" cy="310896"/>
           </a:xfrm>
           <a:prstGeom prst="rect">
@@ -17747,7 +17708,7 @@
         </p:nvSpPr>
         <p:spPr>
           <a:xfrm>
-            <a:off x="8214360" y="2624328"/>
+            <a:off x="8214360" y="2368296"/>
             <a:ext cx="3078480" cy="914400"/>
           </a:xfrm>
           <a:prstGeom prst="rect">
@@ -18213,7 +18174,7 @@
         <p:spPr>
           <a:xfrm>
             <a:off x="685800" y="1481328"/>
-            <a:ext cx="10789920" cy="621792"/>
+            <a:ext cx="10789920" cy="365760"/>
           </a:xfrm>
           <a:prstGeom prst="rect">
             <a:avLst/>
@@ -18254,7 +18215,7 @@
         </p:nvSpPr>
         <p:spPr>
           <a:xfrm>
-            <a:off x="685800" y="2139696"/>
+            <a:off x="685800" y="1883664"/>
             <a:ext cx="5166360" cy="292608"/>
           </a:xfrm>
           <a:prstGeom prst="rect">
@@ -18293,7 +18254,7 @@
         </p:nvSpPr>
         <p:spPr>
           <a:xfrm>
-            <a:off x="685800" y="2542032"/>
+            <a:off x="685800" y="2286000"/>
             <a:ext cx="5166360" cy="1920240"/>
           </a:xfrm>
           <a:prstGeom prst="roundRect">
@@ -18320,7 +18281,7 @@
         </p:nvSpPr>
         <p:spPr>
           <a:xfrm>
-            <a:off x="886968" y="2688336"/>
+            <a:off x="886968" y="2432304"/>
             <a:ext cx="4764024" cy="1627632"/>
           </a:xfrm>
           <a:prstGeom prst="rect">
@@ -18462,7 +18423,7 @@
         </p:nvSpPr>
         <p:spPr>
           <a:xfrm>
-            <a:off x="6309360" y="2139696"/>
+            <a:off x="6309360" y="1883664"/>
             <a:ext cx="5166360" cy="292608"/>
           </a:xfrm>
           <a:prstGeom prst="rect">
@@ -18501,7 +18462,7 @@
         </p:nvSpPr>
         <p:spPr>
           <a:xfrm>
-            <a:off x="6309360" y="2542032"/>
+            <a:off x="6309360" y="2286000"/>
             <a:ext cx="5166360" cy="1554480"/>
           </a:xfrm>
           <a:prstGeom prst="rect">
@@ -18572,7 +18533,7 @@
         </p:nvSpPr>
         <p:spPr>
           <a:xfrm>
-            <a:off x="6309360" y="4169664"/>
+            <a:off x="6309360" y="3913632"/>
             <a:ext cx="5166360" cy="320040"/>
           </a:xfrm>
           <a:prstGeom prst="rect">
@@ -18803,7 +18764,7 @@
         <p:spPr>
           <a:xfrm>
             <a:off x="685800" y="1481328"/>
-            <a:ext cx="10789920" cy="621792"/>
+            <a:ext cx="10789920" cy="365760"/>
           </a:xfrm>
           <a:prstGeom prst="rect">
             <a:avLst/>
@@ -18851,7 +18812,7 @@
           </p:nvPr>
         </p:nvGraphicFramePr>
         <p:xfrm>
-          <a:off x="685800" y="2139696"/>
+          <a:off x="685800" y="1883664"/>
           <a:ext cx="10789920" cy="914400"/>
         </p:xfrm>
         <a:graphic>
@@ -19288,7 +19249,7 @@
         </p:nvSpPr>
         <p:spPr>
           <a:xfrm>
-            <a:off x="685800" y="3739896"/>
+            <a:off x="685800" y="3483864"/>
             <a:ext cx="10789920" cy="658368"/>
           </a:xfrm>
           <a:prstGeom prst="roundRect">
@@ -19315,7 +19276,7 @@
         </p:nvSpPr>
         <p:spPr>
           <a:xfrm>
-            <a:off x="914400" y="3886200"/>
+            <a:off x="914400" y="3630168"/>
             <a:ext cx="10332720" cy="365760"/>
           </a:xfrm>
           <a:prstGeom prst="rect">
@@ -19354,7 +19315,7 @@
         </p:nvSpPr>
         <p:spPr>
           <a:xfrm>
-            <a:off x="685800" y="4562856"/>
+            <a:off x="685800" y="4306824"/>
             <a:ext cx="10789920" cy="457200"/>
           </a:xfrm>
           <a:prstGeom prst="rect">

--- a/slides/第06回_ストレージとファイルシステム.pptx
+++ b/slides/第06回_ストレージとファイルシステム.pptx
@@ -14736,7 +14736,7 @@
                 <a:ea typeface="Courier New" pitchFamily="34" charset="-122"/>
                 <a:cs typeface="Courier New" pitchFamily="34" charset="-120"/>
               </a:rPr>
-              <a:t>6-2</a:t>
+              <a:t>6-3</a:t>
             </a:r>
             <a:endParaRPr lang="en-US" sz="1300" dirty="0"/>
           </a:p>
@@ -14844,7 +14844,7 @@
                 <a:ea typeface="Courier New" pitchFamily="34" charset="-122"/>
                 <a:cs typeface="Courier New" pitchFamily="34" charset="-120"/>
               </a:rPr>
-              <a:t>6-3</a:t>
+              <a:t>6-4</a:t>
             </a:r>
             <a:endParaRPr lang="en-US" sz="1300" dirty="0"/>
           </a:p>
@@ -14952,7 +14952,7 @@
                 <a:ea typeface="Courier New" pitchFamily="34" charset="-122"/>
                 <a:cs typeface="Courier New" pitchFamily="34" charset="-120"/>
               </a:rPr>
-              <a:t>6-4</a:t>
+              <a:t>6-5</a:t>
             </a:r>
             <a:endParaRPr lang="en-US" sz="1300" dirty="0"/>
           </a:p>
